--- a/Chapter 3/Java OOP and Data Structures Chapter 3.pptx
+++ b/Chapter 3/Java OOP and Data Structures Chapter 3.pptx
@@ -2260,7 +2260,7 @@
           <a:p>
             <a:fld id="{C2FFCED8-506F-49AF-BE73-3D1A33480DE3}" type="datetimeFigureOut">
               <a:rPr lang="en-US" smtClean="0"/>
-              <a:t>8/26/2025</a:t>
+              <a:t>9/6/2026</a:t>
             </a:fld>
             <a:endParaRPr lang="en-US"/>
           </a:p>
@@ -2758,7 +2758,7 @@
           <a:p>
             <a:fld id="{EEE8669A-962F-4ACD-AB1E-07597AA7AD56}" type="datetimeFigureOut">
               <a:rPr lang="en-US" smtClean="0"/>
-              <a:t>8/26/2025</a:t>
+              <a:t>9/6/2026</a:t>
             </a:fld>
             <a:endParaRPr lang="en-US"/>
           </a:p>
@@ -2956,7 +2956,7 @@
           <a:p>
             <a:fld id="{EEE8669A-962F-4ACD-AB1E-07597AA7AD56}" type="datetimeFigureOut">
               <a:rPr lang="en-US" smtClean="0"/>
-              <a:t>8/26/2025</a:t>
+              <a:t>9/6/2026</a:t>
             </a:fld>
             <a:endParaRPr lang="en-US"/>
           </a:p>
@@ -3164,7 +3164,7 @@
           <a:p>
             <a:fld id="{EEE8669A-962F-4ACD-AB1E-07597AA7AD56}" type="datetimeFigureOut">
               <a:rPr lang="en-US" smtClean="0"/>
-              <a:t>8/26/2025</a:t>
+              <a:t>9/6/2026</a:t>
             </a:fld>
             <a:endParaRPr lang="en-US"/>
           </a:p>
@@ -3362,7 +3362,7 @@
           <a:p>
             <a:fld id="{EEE8669A-962F-4ACD-AB1E-07597AA7AD56}" type="datetimeFigureOut">
               <a:rPr lang="en-US" smtClean="0"/>
-              <a:t>8/26/2025</a:t>
+              <a:t>9/6/2026</a:t>
             </a:fld>
             <a:endParaRPr lang="en-US"/>
           </a:p>
@@ -3637,7 +3637,7 @@
           <a:p>
             <a:fld id="{EEE8669A-962F-4ACD-AB1E-07597AA7AD56}" type="datetimeFigureOut">
               <a:rPr lang="en-US" smtClean="0"/>
-              <a:t>8/26/2025</a:t>
+              <a:t>9/6/2026</a:t>
             </a:fld>
             <a:endParaRPr lang="en-US"/>
           </a:p>
@@ -3902,7 +3902,7 @@
           <a:p>
             <a:fld id="{EEE8669A-962F-4ACD-AB1E-07597AA7AD56}" type="datetimeFigureOut">
               <a:rPr lang="en-US" smtClean="0"/>
-              <a:t>8/26/2025</a:t>
+              <a:t>9/6/2026</a:t>
             </a:fld>
             <a:endParaRPr lang="en-US"/>
           </a:p>
@@ -4314,7 +4314,7 @@
           <a:p>
             <a:fld id="{EEE8669A-962F-4ACD-AB1E-07597AA7AD56}" type="datetimeFigureOut">
               <a:rPr lang="en-US" smtClean="0"/>
-              <a:t>8/26/2025</a:t>
+              <a:t>9/6/2026</a:t>
             </a:fld>
             <a:endParaRPr lang="en-US"/>
           </a:p>
@@ -4455,7 +4455,7 @@
           <a:p>
             <a:fld id="{EEE8669A-962F-4ACD-AB1E-07597AA7AD56}" type="datetimeFigureOut">
               <a:rPr lang="en-US" smtClean="0"/>
-              <a:t>8/26/2025</a:t>
+              <a:t>9/6/2026</a:t>
             </a:fld>
             <a:endParaRPr lang="en-US"/>
           </a:p>
@@ -4568,7 +4568,7 @@
           <a:p>
             <a:fld id="{EEE8669A-962F-4ACD-AB1E-07597AA7AD56}" type="datetimeFigureOut">
               <a:rPr lang="en-US" smtClean="0"/>
-              <a:t>8/26/2025</a:t>
+              <a:t>9/6/2026</a:t>
             </a:fld>
             <a:endParaRPr lang="en-US"/>
           </a:p>
@@ -4879,7 +4879,7 @@
           <a:p>
             <a:fld id="{EEE8669A-962F-4ACD-AB1E-07597AA7AD56}" type="datetimeFigureOut">
               <a:rPr lang="en-US" smtClean="0"/>
-              <a:t>8/26/2025</a:t>
+              <a:t>9/6/2026</a:t>
             </a:fld>
             <a:endParaRPr lang="en-US"/>
           </a:p>
@@ -5167,7 +5167,7 @@
           <a:p>
             <a:fld id="{EEE8669A-962F-4ACD-AB1E-07597AA7AD56}" type="datetimeFigureOut">
               <a:rPr lang="en-US" smtClean="0"/>
-              <a:t>8/26/2025</a:t>
+              <a:t>9/6/2026</a:t>
             </a:fld>
             <a:endParaRPr lang="en-US"/>
           </a:p>
@@ -5408,7 +5408,7 @@
           <a:p>
             <a:fld id="{EEE8669A-962F-4ACD-AB1E-07597AA7AD56}" type="datetimeFigureOut">
               <a:rPr lang="en-US" smtClean="0"/>
-              <a:t>8/26/2025</a:t>
+              <a:t>9/6/2026</a:t>
             </a:fld>
             <a:endParaRPr lang="en-US"/>
           </a:p>
@@ -5827,10 +5827,13 @@
       </p:grpSpPr>
       <p:pic>
         <p:nvPicPr>
-          <p:cNvPr id="3" name="Picture 2" descr="A book cover with text&#10;&#10;AI-generated content may be incorrect.">
+          <p:cNvPr id="3" name="Picture 2">
             <a:extLst>
               <a:ext uri="{FF2B5EF4-FFF2-40B4-BE49-F238E27FC236}">
                 <a16:creationId xmlns:a16="http://schemas.microsoft.com/office/drawing/2014/main" id="{9B42642B-877C-E7C7-3675-E381E528B9A1}"/>
+              </a:ext>
+              <a:ext uri="{C183D7F6-B498-43B3-948B-1728B52AA6E4}">
+                <adec:decorative xmlns:adec="http://schemas.microsoft.com/office/drawing/2017/decorative" val="1"/>
               </a:ext>
             </a:extLst>
           </p:cNvPr>
@@ -7564,7 +7567,7 @@
       </p:pic>
       <p:pic>
         <p:nvPicPr>
-          <p:cNvPr id="5" name="Picture 4">
+          <p:cNvPr id="5" name="Picture 4" descr="&quot;Has-a&quot; relationship between Person class and Outfit class, with outfit connected with Person via a line and a diamond at the Person side">
             <a:extLst>
               <a:ext uri="{FF2B5EF4-FFF2-40B4-BE49-F238E27FC236}">
                 <a16:creationId xmlns:a16="http://schemas.microsoft.com/office/drawing/2014/main" id="{B9119609-21FB-268D-896E-51DC72617E13}"/>
